--- a/SRO/study-planner/presentation/Планировщик_учебных_задач_Стрелов_Григорий.pptx
+++ b/SRO/study-planner/presentation/Планировщик_учебных_задач_Стрелов_Григорий.pptx
@@ -5,17 +5,17 @@
     <p:sldMasterId id="2147483648" r:id="rId1"/>
   </p:sldMasterIdLst>
   <p:sldIdLst>
-    <p:sldId id="256" r:id="rId7"/>
-    <p:sldId id="257" r:id="rId8"/>
-    <p:sldId id="258" r:id="rId9"/>
-    <p:sldId id="259" r:id="rId10"/>
-    <p:sldId id="260" r:id="rId11"/>
-    <p:sldId id="261" r:id="rId12"/>
-    <p:sldId id="262" r:id="rId13"/>
-    <p:sldId id="263" r:id="rId14"/>
-    <p:sldId id="264" r:id="rId15"/>
+    <p:sldId id="256" r:id="rId2"/>
+    <p:sldId id="257" r:id="rId3"/>
+    <p:sldId id="258" r:id="rId4"/>
+    <p:sldId id="259" r:id="rId5"/>
+    <p:sldId id="260" r:id="rId6"/>
+    <p:sldId id="261" r:id="rId7"/>
+    <p:sldId id="262" r:id="rId8"/>
+    <p:sldId id="263" r:id="rId9"/>
+    <p:sldId id="264" r:id="rId10"/>
   </p:sldIdLst>
-  <p:sldSz cx="12191695" cy="6858000" type="screen4x3"/>
+  <p:sldSz cx="12192000" cy="6858000"/>
   <p:notesSz cx="6858000" cy="9144000"/>
   <p:defaultTextStyle>
     <a:defPPr>
@@ -112,6 +112,22 @@
       </a:defRPr>
     </a:lvl9pPr>
   </p:defaultTextStyle>
+  <p:extLst>
+    <p:ext uri="{EFAFB233-063F-42B5-8137-9DF3F51BA10A}">
+      <p15:sldGuideLst xmlns:p15="http://schemas.microsoft.com/office/powerpoint/2012/main">
+        <p15:guide id="1" orient="horz" pos="2160">
+          <p15:clr>
+            <a:srgbClr val="A4A3A4"/>
+          </p15:clr>
+        </p15:guide>
+        <p15:guide id="2" pos="2880">
+          <p15:clr>
+            <a:srgbClr val="A4A3A4"/>
+          </p15:clr>
+        </p15:guide>
+      </p15:sldGuideLst>
+    </p:ext>
+  </p:extLst>
 </p:presentation>
 </file>
 
@@ -296,7 +312,7 @@
           <a:p>
             <a:fld id="{5BCAD085-E8A6-8845-BD4E-CB4CCA059FC4}" type="datetimeFigureOut">
               <a:rPr lang="en-US" smtClean="0"/>
-              <a:t>1/27/13</a:t>
+              <a:t>10/21/2026</a:t>
             </a:fld>
             <a:endParaRPr lang="en-US"/>
           </a:p>
@@ -466,7 +482,7 @@
           <a:p>
             <a:fld id="{5BCAD085-E8A6-8845-BD4E-CB4CCA059FC4}" type="datetimeFigureOut">
               <a:rPr lang="en-US" smtClean="0"/>
-              <a:t>1/27/13</a:t>
+              <a:t>10/21/2026</a:t>
             </a:fld>
             <a:endParaRPr lang="en-US"/>
           </a:p>
@@ -646,7 +662,7 @@
           <a:p>
             <a:fld id="{5BCAD085-E8A6-8845-BD4E-CB4CCA059FC4}" type="datetimeFigureOut">
               <a:rPr lang="en-US" smtClean="0"/>
-              <a:t>1/27/13</a:t>
+              <a:t>10/21/2026</a:t>
             </a:fld>
             <a:endParaRPr lang="en-US"/>
           </a:p>
@@ -816,7 +832,7 @@
           <a:p>
             <a:fld id="{5BCAD085-E8A6-8845-BD4E-CB4CCA059FC4}" type="datetimeFigureOut">
               <a:rPr lang="en-US" smtClean="0"/>
-              <a:t>1/27/13</a:t>
+              <a:t>10/21/2026</a:t>
             </a:fld>
             <a:endParaRPr lang="en-US"/>
           </a:p>
@@ -1062,7 +1078,7 @@
           <a:p>
             <a:fld id="{5BCAD085-E8A6-8845-BD4E-CB4CCA059FC4}" type="datetimeFigureOut">
               <a:rPr lang="en-US" smtClean="0"/>
-              <a:t>1/27/13</a:t>
+              <a:t>10/21/2026</a:t>
             </a:fld>
             <a:endParaRPr lang="en-US"/>
           </a:p>
@@ -1350,7 +1366,7 @@
           <a:p>
             <a:fld id="{5BCAD085-E8A6-8845-BD4E-CB4CCA059FC4}" type="datetimeFigureOut">
               <a:rPr lang="en-US" smtClean="0"/>
-              <a:t>1/27/13</a:t>
+              <a:t>10/21/2026</a:t>
             </a:fld>
             <a:endParaRPr lang="en-US"/>
           </a:p>
@@ -1772,7 +1788,7 @@
           <a:p>
             <a:fld id="{5BCAD085-E8A6-8845-BD4E-CB4CCA059FC4}" type="datetimeFigureOut">
               <a:rPr lang="en-US" smtClean="0"/>
-              <a:t>1/27/13</a:t>
+              <a:t>10/21/2026</a:t>
             </a:fld>
             <a:endParaRPr lang="en-US"/>
           </a:p>
@@ -1890,7 +1906,7 @@
           <a:p>
             <a:fld id="{5BCAD085-E8A6-8845-BD4E-CB4CCA059FC4}" type="datetimeFigureOut">
               <a:rPr lang="en-US" smtClean="0"/>
-              <a:t>1/27/13</a:t>
+              <a:t>10/21/2026</a:t>
             </a:fld>
             <a:endParaRPr lang="en-US"/>
           </a:p>
@@ -1985,7 +2001,7 @@
           <a:p>
             <a:fld id="{5BCAD085-E8A6-8845-BD4E-CB4CCA059FC4}" type="datetimeFigureOut">
               <a:rPr lang="en-US" smtClean="0"/>
-              <a:t>1/27/13</a:t>
+              <a:t>10/21/2026</a:t>
             </a:fld>
             <a:endParaRPr lang="en-US"/>
           </a:p>
@@ -2262,7 +2278,7 @@
           <a:p>
             <a:fld id="{5BCAD085-E8A6-8845-BD4E-CB4CCA059FC4}" type="datetimeFigureOut">
               <a:rPr lang="en-US" smtClean="0"/>
-              <a:t>1/27/13</a:t>
+              <a:t>10/21/2026</a:t>
             </a:fld>
             <a:endParaRPr lang="en-US"/>
           </a:p>
@@ -2515,7 +2531,7 @@
           <a:p>
             <a:fld id="{5BCAD085-E8A6-8845-BD4E-CB4CCA059FC4}" type="datetimeFigureOut">
               <a:rPr lang="en-US" smtClean="0"/>
-              <a:t>1/27/13</a:t>
+              <a:t>10/21/2026</a:t>
             </a:fld>
             <a:endParaRPr lang="en-US"/>
           </a:p>
@@ -2728,7 +2744,7 @@
           <a:p>
             <a:fld id="{5BCAD085-E8A6-8845-BD4E-CB4CCA059FC4}" type="datetimeFigureOut">
               <a:rPr lang="en-US" smtClean="0"/>
-              <a:t>1/27/13</a:t>
+              <a:t>10/21/2026</a:t>
             </a:fld>
             <a:endParaRPr lang="en-US"/>
           </a:p>
@@ -3087,7 +3103,7 @@
 </file>
 
 <file path=ppt/slides/slide1.xml><?xml version="1.0" encoding="utf-8"?>
-<p:sld xmlns:a="http://schemas.openxmlformats.org/drawingml/2006/main" xmlns:p="http://schemas.openxmlformats.org/presentationml/2006/main" xmlns:r="http://schemas.openxmlformats.org/officeDocument/2006/relationships">
+<p:sld xmlns:a="http://schemas.openxmlformats.org/drawingml/2006/main" xmlns:r="http://schemas.openxmlformats.org/officeDocument/2006/relationships" xmlns:p="http://schemas.openxmlformats.org/presentationml/2006/main">
   <p:cSld>
     <p:bg>
       <p:bgPr>
@@ -3103,7 +3119,14 @@
         <p:cNvGrpSpPr/>
         <p:nvPr/>
       </p:nvGrpSpPr>
-      <p:grpSpPr/>
+      <p:grpSpPr>
+        <a:xfrm>
+          <a:off x="0" y="0"/>
+          <a:ext cx="0" cy="0"/>
+          <a:chOff x="0" y="0"/>
+          <a:chExt cx="0" cy="0"/>
+        </a:xfrm>
+      </p:grpSpPr>
       <p:sp>
         <p:nvSpPr>
           <p:cNvPr id="2" name="Rectangle 1"/>
@@ -3144,6 +3167,7 @@
           <a:lstStyle/>
           <a:p>
             <a:pPr algn="ctr"/>
+            <a:endParaRPr/>
           </a:p>
         </p:txBody>
       </p:sp>
@@ -3179,41 +3203,6 @@
               </a:rPr>
               <a:t>ПЛАНИРОВЩИК
 УЧЕБНЫХ ЗАДАЧ</a:t>
-            </a:r>
-          </a:p>
-        </p:txBody>
-      </p:sp>
-      <p:sp>
-        <p:nvSpPr>
-          <p:cNvPr id="4" name="TextBox 3"/>
-          <p:cNvSpPr txBox="1"/>
-          <p:nvPr/>
-        </p:nvSpPr>
-        <p:spPr>
-          <a:xfrm>
-            <a:off x="822960" y="2788920"/>
-            <a:ext cx="4114800" cy="365760"/>
-          </a:xfrm>
-          <a:prstGeom prst="rect">
-            <a:avLst/>
-          </a:prstGeom>
-          <a:noFill/>
-        </p:spPr>
-        <p:txBody>
-          <a:bodyPr wrap="square">
-            <a:spAutoFit/>
-          </a:bodyPr>
-          <a:lstStyle/>
-          <a:p>
-            <a:pPr algn="l"/>
-            <a:r>
-              <a:rPr sz="1700" b="1">
-                <a:solidFill>
-                  <a:srgbClr val="2D5BFF"/>
-                </a:solidFill>
-                <a:latin typeface="Aptos"/>
-              </a:rPr>
-              <a:t>Учебный мини-проект</a:t>
             </a:r>
           </a:p>
         </p:txBody>
@@ -3331,6 +3320,7 @@
           <a:lstStyle/>
           <a:p>
             <a:pPr algn="ctr"/>
+            <a:endParaRPr/>
           </a:p>
         </p:txBody>
       </p:sp>
@@ -3374,6 +3364,7 @@
           <a:lstStyle/>
           <a:p>
             <a:pPr algn="ctr"/>
+            <a:endParaRPr/>
           </a:p>
         </p:txBody>
       </p:sp>
@@ -3454,6 +3445,7 @@
           <a:lstStyle/>
           <a:p>
             <a:pPr algn="ctr"/>
+            <a:endParaRPr/>
           </a:p>
         </p:txBody>
       </p:sp>
@@ -3497,6 +3489,7 @@
           <a:lstStyle/>
           <a:p>
             <a:pPr algn="ctr"/>
+            <a:endParaRPr/>
           </a:p>
         </p:txBody>
       </p:sp>
@@ -3577,6 +3570,7 @@
           <a:lstStyle/>
           <a:p>
             <a:pPr algn="ctr"/>
+            <a:endParaRPr/>
           </a:p>
         </p:txBody>
       </p:sp>
@@ -3620,6 +3614,7 @@
           <a:lstStyle/>
           <a:p>
             <a:pPr algn="ctr"/>
+            <a:endParaRPr/>
           </a:p>
         </p:txBody>
       </p:sp>
@@ -3698,11 +3693,18 @@
   <p:clrMapOvr>
     <a:masterClrMapping/>
   </p:clrMapOvr>
+  <p:timing>
+    <p:tnLst>
+      <p:par>
+        <p:cTn id="1" dur="indefinite" restart="never" nodeType="tmRoot"/>
+      </p:par>
+    </p:tnLst>
+  </p:timing>
 </p:sld>
 </file>
 
 <file path=ppt/slides/slide2.xml><?xml version="1.0" encoding="utf-8"?>
-<p:sld xmlns:a="http://schemas.openxmlformats.org/drawingml/2006/main" xmlns:p="http://schemas.openxmlformats.org/presentationml/2006/main" xmlns:r="http://schemas.openxmlformats.org/officeDocument/2006/relationships">
+<p:sld xmlns:a="http://schemas.openxmlformats.org/drawingml/2006/main" xmlns:r="http://schemas.openxmlformats.org/officeDocument/2006/relationships" xmlns:p="http://schemas.openxmlformats.org/presentationml/2006/main">
   <p:cSld>
     <p:bg>
       <p:bgPr>
@@ -3718,7 +3720,14 @@
         <p:cNvGrpSpPr/>
         <p:nvPr/>
       </p:nvGrpSpPr>
-      <p:grpSpPr/>
+      <p:grpSpPr>
+        <a:xfrm>
+          <a:off x="0" y="0"/>
+          <a:ext cx="0" cy="0"/>
+          <a:chOff x="0" y="0"/>
+          <a:chExt cx="0" cy="0"/>
+        </a:xfrm>
+      </p:grpSpPr>
       <p:sp>
         <p:nvSpPr>
           <p:cNvPr id="2" name="Rectangle 1"/>
@@ -3759,6 +3768,7 @@
           <a:lstStyle/>
           <a:p>
             <a:pPr algn="ctr"/>
+            <a:endParaRPr/>
           </a:p>
         </p:txBody>
       </p:sp>
@@ -3874,6 +3884,7 @@
           <a:lstStyle/>
           <a:p>
             <a:pPr algn="ctr"/>
+            <a:endParaRPr/>
           </a:p>
         </p:txBody>
       </p:sp>
@@ -3917,6 +3928,7 @@
           <a:lstStyle/>
           <a:p>
             <a:pPr algn="ctr"/>
+            <a:endParaRPr/>
           </a:p>
         </p:txBody>
       </p:sp>
@@ -4032,6 +4044,7 @@
           <a:lstStyle/>
           <a:p>
             <a:pPr algn="ctr"/>
+            <a:endParaRPr/>
           </a:p>
         </p:txBody>
       </p:sp>
@@ -4075,6 +4088,7 @@
           <a:lstStyle/>
           <a:p>
             <a:pPr algn="ctr"/>
+            <a:endParaRPr/>
           </a:p>
         </p:txBody>
       </p:sp>
@@ -4190,6 +4204,7 @@
           <a:lstStyle/>
           <a:p>
             <a:pPr algn="ctr"/>
+            <a:endParaRPr/>
           </a:p>
         </p:txBody>
       </p:sp>
@@ -4233,6 +4248,7 @@
           <a:lstStyle/>
           <a:p>
             <a:pPr algn="ctr"/>
+            <a:endParaRPr/>
           </a:p>
         </p:txBody>
       </p:sp>
@@ -4330,14 +4346,38 @@
           <a:p>
             <a:pPr algn="l"/>
             <a:r>
-              <a:rPr sz="1900" b="1">
+              <a:rPr sz="1900" b="1" dirty="0" err="1">
                 <a:solidFill>
                   <a:srgbClr val="17253D"/>
                 </a:solidFill>
                 <a:latin typeface="Aptos"/>
               </a:rPr>
-              <a:t>Цель проекта</a:t>
-            </a:r>
+              <a:t>Цель</a:t>
+            </a:r>
+            <a:r>
+              <a:rPr sz="1900" b="1" dirty="0">
+                <a:solidFill>
+                  <a:srgbClr val="17253D"/>
+                </a:solidFill>
+                <a:latin typeface="Aptos"/>
+              </a:rPr>
+              <a:t> </a:t>
+            </a:r>
+            <a:r>
+              <a:rPr sz="1900" b="1" dirty="0" err="1" smtClean="0">
+                <a:solidFill>
+                  <a:srgbClr val="17253D"/>
+                </a:solidFill>
+                <a:latin typeface="Aptos"/>
+              </a:rPr>
+              <a:t>проекта</a:t>
+            </a:r>
+            <a:endParaRPr sz="1900" b="1" dirty="0">
+              <a:solidFill>
+                <a:srgbClr val="17253D"/>
+              </a:solidFill>
+              <a:latin typeface="Aptos"/>
+            </a:endParaRPr>
           </a:p>
         </p:txBody>
       </p:sp>
@@ -4416,11 +4456,18 @@
   <p:clrMapOvr>
     <a:masterClrMapping/>
   </p:clrMapOvr>
+  <p:timing>
+    <p:tnLst>
+      <p:par>
+        <p:cTn id="1" dur="indefinite" restart="never" nodeType="tmRoot"/>
+      </p:par>
+    </p:tnLst>
+  </p:timing>
 </p:sld>
 </file>
 
 <file path=ppt/slides/slide3.xml><?xml version="1.0" encoding="utf-8"?>
-<p:sld xmlns:a="http://schemas.openxmlformats.org/drawingml/2006/main" xmlns:p="http://schemas.openxmlformats.org/presentationml/2006/main" xmlns:r="http://schemas.openxmlformats.org/officeDocument/2006/relationships">
+<p:sld xmlns:a="http://schemas.openxmlformats.org/drawingml/2006/main" xmlns:r="http://schemas.openxmlformats.org/officeDocument/2006/relationships" xmlns:p="http://schemas.openxmlformats.org/presentationml/2006/main">
   <p:cSld>
     <p:bg>
       <p:bgPr>
@@ -4436,7 +4483,14 @@
         <p:cNvGrpSpPr/>
         <p:nvPr/>
       </p:nvGrpSpPr>
-      <p:grpSpPr/>
+      <p:grpSpPr>
+        <a:xfrm>
+          <a:off x="0" y="0"/>
+          <a:ext cx="0" cy="0"/>
+          <a:chOff x="0" y="0"/>
+          <a:chExt cx="0" cy="0"/>
+        </a:xfrm>
+      </p:grpSpPr>
       <p:sp>
         <p:nvSpPr>
           <p:cNvPr id="2" name="Rectangle 1"/>
@@ -4477,6 +4531,7 @@
           <a:lstStyle/>
           <a:p>
             <a:pPr algn="ctr"/>
+            <a:endParaRPr/>
           </a:p>
         </p:txBody>
       </p:sp>
@@ -4592,6 +4647,7 @@
           <a:lstStyle/>
           <a:p>
             <a:pPr algn="ctr"/>
+            <a:endParaRPr/>
           </a:p>
         </p:txBody>
       </p:sp>
@@ -4635,6 +4691,7 @@
           <a:lstStyle/>
           <a:p>
             <a:pPr algn="ctr"/>
+            <a:endParaRPr/>
           </a:p>
         </p:txBody>
       </p:sp>
@@ -4751,6 +4808,7 @@
           <a:lstStyle/>
           <a:p>
             <a:pPr algn="ctr"/>
+            <a:endParaRPr/>
           </a:p>
         </p:txBody>
       </p:sp>
@@ -4794,6 +4852,7 @@
           <a:lstStyle/>
           <a:p>
             <a:pPr algn="ctr"/>
+            <a:endParaRPr/>
           </a:p>
         </p:txBody>
       </p:sp>
@@ -4910,6 +4969,7 @@
           <a:lstStyle/>
           <a:p>
             <a:pPr algn="ctr"/>
+            <a:endParaRPr/>
           </a:p>
         </p:txBody>
       </p:sp>
@@ -4953,6 +5013,7 @@
           <a:lstStyle/>
           <a:p>
             <a:pPr algn="ctr"/>
+            <a:endParaRPr/>
           </a:p>
         </p:txBody>
       </p:sp>
@@ -5137,11 +5198,18 @@
   <p:clrMapOvr>
     <a:masterClrMapping/>
   </p:clrMapOvr>
+  <p:timing>
+    <p:tnLst>
+      <p:par>
+        <p:cTn id="1" dur="indefinite" restart="never" nodeType="tmRoot"/>
+      </p:par>
+    </p:tnLst>
+  </p:timing>
 </p:sld>
 </file>
 
 <file path=ppt/slides/slide4.xml><?xml version="1.0" encoding="utf-8"?>
-<p:sld xmlns:a="http://schemas.openxmlformats.org/drawingml/2006/main" xmlns:p="http://schemas.openxmlformats.org/presentationml/2006/main" xmlns:r="http://schemas.openxmlformats.org/officeDocument/2006/relationships">
+<p:sld xmlns:a="http://schemas.openxmlformats.org/drawingml/2006/main" xmlns:r="http://schemas.openxmlformats.org/officeDocument/2006/relationships" xmlns:p="http://schemas.openxmlformats.org/presentationml/2006/main">
   <p:cSld>
     <p:bg>
       <p:bgPr>
@@ -5157,7 +5225,14 @@
         <p:cNvGrpSpPr/>
         <p:nvPr/>
       </p:nvGrpSpPr>
-      <p:grpSpPr/>
+      <p:grpSpPr>
+        <a:xfrm>
+          <a:off x="0" y="0"/>
+          <a:ext cx="0" cy="0"/>
+          <a:chOff x="0" y="0"/>
+          <a:chExt cx="0" cy="0"/>
+        </a:xfrm>
+      </p:grpSpPr>
       <p:sp>
         <p:nvSpPr>
           <p:cNvPr id="2" name="Rectangle 1"/>
@@ -5198,6 +5273,7 @@
           <a:lstStyle/>
           <a:p>
             <a:pPr algn="ctr"/>
+            <a:endParaRPr/>
           </a:p>
         </p:txBody>
       </p:sp>
@@ -5313,6 +5389,7 @@
           <a:lstStyle/>
           <a:p>
             <a:pPr algn="ctr"/>
+            <a:endParaRPr/>
           </a:p>
         </p:txBody>
       </p:sp>
@@ -5356,6 +5433,7 @@
           <a:lstStyle/>
           <a:p>
             <a:pPr algn="ctr"/>
+            <a:endParaRPr/>
           </a:p>
         </p:txBody>
       </p:sp>
@@ -5506,6 +5584,7 @@
           <a:lstStyle/>
           <a:p>
             <a:pPr algn="ctr"/>
+            <a:endParaRPr/>
           </a:p>
         </p:txBody>
       </p:sp>
@@ -5549,6 +5628,7 @@
           <a:lstStyle/>
           <a:p>
             <a:pPr algn="ctr"/>
+            <a:endParaRPr/>
           </a:p>
         </p:txBody>
       </p:sp>
@@ -5699,6 +5779,7 @@
           <a:lstStyle/>
           <a:p>
             <a:pPr algn="ctr"/>
+            <a:endParaRPr/>
           </a:p>
         </p:txBody>
       </p:sp>
@@ -5742,6 +5823,7 @@
           <a:lstStyle/>
           <a:p>
             <a:pPr algn="ctr"/>
+            <a:endParaRPr/>
           </a:p>
         </p:txBody>
       </p:sp>
@@ -5892,6 +5974,7 @@
           <a:lstStyle/>
           <a:p>
             <a:pPr algn="ctr"/>
+            <a:endParaRPr/>
           </a:p>
         </p:txBody>
       </p:sp>
@@ -5935,6 +6018,7 @@
           <a:lstStyle/>
           <a:p>
             <a:pPr algn="ctr"/>
+            <a:endParaRPr/>
           </a:p>
         </p:txBody>
       </p:sp>
@@ -6085,6 +6169,7 @@
           <a:lstStyle/>
           <a:p>
             <a:pPr algn="ctr"/>
+            <a:endParaRPr/>
           </a:p>
         </p:txBody>
       </p:sp>
@@ -6128,6 +6213,7 @@
           <a:lstStyle/>
           <a:p>
             <a:pPr algn="ctr"/>
+            <a:endParaRPr/>
           </a:p>
         </p:txBody>
       </p:sp>
@@ -6278,6 +6364,7 @@
           <a:lstStyle/>
           <a:p>
             <a:pPr algn="ctr"/>
+            <a:endParaRPr/>
           </a:p>
         </p:txBody>
       </p:sp>
@@ -6321,6 +6408,7 @@
           <a:lstStyle/>
           <a:p>
             <a:pPr algn="ctr"/>
+            <a:endParaRPr/>
           </a:p>
         </p:txBody>
       </p:sp>
@@ -6469,11 +6557,18 @@
   <p:clrMapOvr>
     <a:masterClrMapping/>
   </p:clrMapOvr>
+  <p:timing>
+    <p:tnLst>
+      <p:par>
+        <p:cTn id="1" dur="indefinite" restart="never" nodeType="tmRoot"/>
+      </p:par>
+    </p:tnLst>
+  </p:timing>
 </p:sld>
 </file>
 
 <file path=ppt/slides/slide5.xml><?xml version="1.0" encoding="utf-8"?>
-<p:sld xmlns:a="http://schemas.openxmlformats.org/drawingml/2006/main" xmlns:p="http://schemas.openxmlformats.org/presentationml/2006/main" xmlns:r="http://schemas.openxmlformats.org/officeDocument/2006/relationships">
+<p:sld xmlns:a="http://schemas.openxmlformats.org/drawingml/2006/main" xmlns:r="http://schemas.openxmlformats.org/officeDocument/2006/relationships" xmlns:p="http://schemas.openxmlformats.org/presentationml/2006/main">
   <p:cSld>
     <p:bg>
       <p:bgPr>
@@ -6489,7 +6584,14 @@
         <p:cNvGrpSpPr/>
         <p:nvPr/>
       </p:nvGrpSpPr>
-      <p:grpSpPr/>
+      <p:grpSpPr>
+        <a:xfrm>
+          <a:off x="0" y="0"/>
+          <a:ext cx="0" cy="0"/>
+          <a:chOff x="0" y="0"/>
+          <a:chExt cx="0" cy="0"/>
+        </a:xfrm>
+      </p:grpSpPr>
       <p:sp>
         <p:nvSpPr>
           <p:cNvPr id="2" name="Rectangle 1"/>
@@ -6530,6 +6632,7 @@
           <a:lstStyle/>
           <a:p>
             <a:pPr algn="ctr"/>
+            <a:endParaRPr/>
           </a:p>
         </p:txBody>
       </p:sp>
@@ -6645,6 +6748,7 @@
           <a:lstStyle/>
           <a:p>
             <a:pPr algn="ctr"/>
+            <a:endParaRPr/>
           </a:p>
         </p:txBody>
       </p:sp>
@@ -6795,6 +6899,7 @@
           <a:lstStyle/>
           <a:p>
             <a:pPr algn="ctr"/>
+            <a:endParaRPr/>
           </a:p>
         </p:txBody>
       </p:sp>
@@ -6945,6 +7050,7 @@
           <a:lstStyle/>
           <a:p>
             <a:pPr algn="ctr"/>
+            <a:endParaRPr/>
           </a:p>
         </p:txBody>
       </p:sp>
@@ -7095,6 +7201,7 @@
           <a:lstStyle/>
           <a:p>
             <a:pPr algn="ctr"/>
+            <a:endParaRPr/>
           </a:p>
         </p:txBody>
       </p:sp>
@@ -7176,7 +7283,7 @@
         </p:nvSpPr>
         <p:spPr>
           <a:xfrm>
-            <a:off x="731520" y="3886200"/>
+            <a:off x="731520" y="3657600"/>
             <a:ext cx="2743200" cy="320040"/>
           </a:xfrm>
           <a:prstGeom prst="rect">
@@ -7192,14 +7299,56 @@
           <a:p>
             <a:pPr algn="l"/>
             <a:r>
-              <a:rPr sz="1800" b="1">
+              <a:rPr sz="1800" b="1" dirty="0" err="1">
                 <a:solidFill>
                   <a:srgbClr val="17253D"/>
                 </a:solidFill>
                 <a:latin typeface="Aptos"/>
               </a:rPr>
-              <a:t>Структура одной задачи</a:t>
-            </a:r>
+              <a:t>Структура</a:t>
+            </a:r>
+            <a:r>
+              <a:rPr sz="1800" b="1" dirty="0">
+                <a:solidFill>
+                  <a:srgbClr val="17253D"/>
+                </a:solidFill>
+                <a:latin typeface="Aptos"/>
+              </a:rPr>
+              <a:t> </a:t>
+            </a:r>
+            <a:r>
+              <a:rPr sz="1800" b="1" dirty="0" err="1">
+                <a:solidFill>
+                  <a:srgbClr val="17253D"/>
+                </a:solidFill>
+                <a:latin typeface="Aptos"/>
+              </a:rPr>
+              <a:t>одной</a:t>
+            </a:r>
+            <a:r>
+              <a:rPr sz="1800" b="1" dirty="0">
+                <a:solidFill>
+                  <a:srgbClr val="17253D"/>
+                </a:solidFill>
+                <a:latin typeface="Aptos"/>
+              </a:rPr>
+              <a:t> </a:t>
+            </a:r>
+            <a:r>
+              <a:rPr sz="1800" b="1" dirty="0" err="1">
+                <a:solidFill>
+                  <a:srgbClr val="17253D"/>
+                </a:solidFill>
+                <a:latin typeface="Aptos"/>
+              </a:rPr>
+              <a:t>задачи</a:t>
+            </a:r>
+            <a:endParaRPr sz="1800" b="1" dirty="0">
+              <a:solidFill>
+                <a:srgbClr val="17253D"/>
+              </a:solidFill>
+              <a:latin typeface="Aptos"/>
+            </a:endParaRPr>
           </a:p>
         </p:txBody>
       </p:sp>
@@ -7243,6 +7392,7 @@
           <a:lstStyle/>
           <a:p>
             <a:pPr algn="ctr"/>
+            <a:endParaRPr/>
           </a:p>
         </p:txBody>
       </p:sp>
@@ -7356,11 +7506,18 @@
   <p:clrMapOvr>
     <a:masterClrMapping/>
   </p:clrMapOvr>
+  <p:timing>
+    <p:tnLst>
+      <p:par>
+        <p:cTn id="1" dur="indefinite" restart="never" nodeType="tmRoot"/>
+      </p:par>
+    </p:tnLst>
+  </p:timing>
 </p:sld>
 </file>
 
 <file path=ppt/slides/slide6.xml><?xml version="1.0" encoding="utf-8"?>
-<p:sld xmlns:a="http://schemas.openxmlformats.org/drawingml/2006/main" xmlns:p="http://schemas.openxmlformats.org/presentationml/2006/main" xmlns:r="http://schemas.openxmlformats.org/officeDocument/2006/relationships">
+<p:sld xmlns:a="http://schemas.openxmlformats.org/drawingml/2006/main" xmlns:r="http://schemas.openxmlformats.org/officeDocument/2006/relationships" xmlns:p="http://schemas.openxmlformats.org/presentationml/2006/main">
   <p:cSld>
     <p:bg>
       <p:bgPr>
@@ -7376,7 +7533,14 @@
         <p:cNvGrpSpPr/>
         <p:nvPr/>
       </p:nvGrpSpPr>
-      <p:grpSpPr/>
+      <p:grpSpPr>
+        <a:xfrm>
+          <a:off x="0" y="0"/>
+          <a:ext cx="0" cy="0"/>
+          <a:chOff x="0" y="0"/>
+          <a:chExt cx="0" cy="0"/>
+        </a:xfrm>
+      </p:grpSpPr>
       <p:sp>
         <p:nvSpPr>
           <p:cNvPr id="2" name="Rectangle 1"/>
@@ -7417,6 +7581,7 @@
           <a:lstStyle/>
           <a:p>
             <a:pPr algn="ctr"/>
+            <a:endParaRPr/>
           </a:p>
         </p:txBody>
       </p:sp>
@@ -7490,30 +7655,6 @@
           </a:p>
         </p:txBody>
       </p:sp>
-      <p:pic>
-        <p:nvPicPr>
-          <p:cNvPr id="5" name="Picture 4" descr="IMG_2C60B784-90AC-4115-A309-97AB0F37578E.jpeg"/>
-          <p:cNvPicPr>
-            <a:picLocks noChangeAspect="1"/>
-          </p:cNvPicPr>
-          <p:nvPr/>
-        </p:nvPicPr>
-        <p:blipFill>
-          <a:blip r:embed="rId2"/>
-          <a:stretch>
-            <a:fillRect/>
-          </a:stretch>
-        </p:blipFill>
-        <p:spPr>
-          <a:xfrm>
-            <a:off x="685800" y="1325880"/>
-            <a:ext cx="7498079" cy="4526280"/>
-          </a:xfrm>
-          <a:prstGeom prst="rect">
-            <a:avLst/>
-          </a:prstGeom>
-        </p:spPr>
-      </p:pic>
       <p:sp>
         <p:nvSpPr>
           <p:cNvPr id="6" name="Rounded Rectangle 5"/>
@@ -7556,6 +7697,7 @@
           <a:lstStyle/>
           <a:p>
             <a:pPr algn="ctr"/>
+            <a:endParaRPr/>
           </a:p>
         </p:txBody>
       </p:sp>
@@ -7599,6 +7741,7 @@
           <a:lstStyle/>
           <a:p>
             <a:pPr algn="ctr"/>
+            <a:endParaRPr/>
           </a:p>
         </p:txBody>
       </p:sp>
@@ -7714,6 +7857,7 @@
           <a:lstStyle/>
           <a:p>
             <a:pPr algn="ctr"/>
+            <a:endParaRPr/>
           </a:p>
         </p:txBody>
       </p:sp>
@@ -7757,6 +7901,7 @@
           <a:lstStyle/>
           <a:p>
             <a:pPr algn="ctr"/>
+            <a:endParaRPr/>
           </a:p>
         </p:txBody>
       </p:sp>
@@ -7872,6 +8017,7 @@
           <a:lstStyle/>
           <a:p>
             <a:pPr algn="ctr"/>
+            <a:endParaRPr/>
           </a:p>
         </p:txBody>
       </p:sp>
@@ -7915,6 +8061,7 @@
           <a:lstStyle/>
           <a:p>
             <a:pPr algn="ctr"/>
+            <a:endParaRPr/>
           </a:p>
         </p:txBody>
       </p:sp>
@@ -8023,16 +8170,119 @@
           </a:p>
         </p:txBody>
       </p:sp>
+      <p:pic>
+        <p:nvPicPr>
+          <p:cNvPr id="20" name="Рисунок 19"/>
+          <p:cNvPicPr>
+            <a:picLocks noChangeAspect="1"/>
+          </p:cNvPicPr>
+          <p:nvPr/>
+        </p:nvPicPr>
+        <p:blipFill>
+          <a:blip r:embed="rId2"/>
+          <a:stretch>
+            <a:fillRect/>
+          </a:stretch>
+        </p:blipFill>
+        <p:spPr>
+          <a:xfrm>
+            <a:off x="238126" y="1408030"/>
+            <a:ext cx="4114800" cy="2311714"/>
+          </a:xfrm>
+          <a:prstGeom prst="rect">
+            <a:avLst/>
+          </a:prstGeom>
+        </p:spPr>
+      </p:pic>
+      <p:pic>
+        <p:nvPicPr>
+          <p:cNvPr id="21" name="Рисунок 20"/>
+          <p:cNvPicPr>
+            <a:picLocks noChangeAspect="1"/>
+          </p:cNvPicPr>
+          <p:nvPr/>
+        </p:nvPicPr>
+        <p:blipFill>
+          <a:blip r:embed="rId3"/>
+          <a:stretch>
+            <a:fillRect/>
+          </a:stretch>
+        </p:blipFill>
+        <p:spPr>
+          <a:xfrm>
+            <a:off x="4352927" y="1408030"/>
+            <a:ext cx="4022978" cy="2348144"/>
+          </a:xfrm>
+          <a:prstGeom prst="rect">
+            <a:avLst/>
+          </a:prstGeom>
+        </p:spPr>
+      </p:pic>
+      <p:pic>
+        <p:nvPicPr>
+          <p:cNvPr id="22" name="Рисунок 21"/>
+          <p:cNvPicPr>
+            <a:picLocks noChangeAspect="1"/>
+          </p:cNvPicPr>
+          <p:nvPr/>
+        </p:nvPicPr>
+        <p:blipFill>
+          <a:blip r:embed="rId4"/>
+          <a:stretch>
+            <a:fillRect/>
+          </a:stretch>
+        </p:blipFill>
+        <p:spPr>
+          <a:xfrm>
+            <a:off x="238126" y="3719744"/>
+            <a:ext cx="4114800" cy="2383876"/>
+          </a:xfrm>
+          <a:prstGeom prst="rect">
+            <a:avLst/>
+          </a:prstGeom>
+        </p:spPr>
+      </p:pic>
+      <p:pic>
+        <p:nvPicPr>
+          <p:cNvPr id="23" name="Рисунок 22"/>
+          <p:cNvPicPr>
+            <a:picLocks noChangeAspect="1"/>
+          </p:cNvPicPr>
+          <p:nvPr/>
+        </p:nvPicPr>
+        <p:blipFill>
+          <a:blip r:embed="rId5"/>
+          <a:stretch>
+            <a:fillRect/>
+          </a:stretch>
+        </p:blipFill>
+        <p:spPr>
+          <a:xfrm>
+            <a:off x="4352927" y="3719745"/>
+            <a:ext cx="4022978" cy="2383876"/>
+          </a:xfrm>
+          <a:prstGeom prst="rect">
+            <a:avLst/>
+          </a:prstGeom>
+        </p:spPr>
+      </p:pic>
     </p:spTree>
   </p:cSld>
   <p:clrMapOvr>
     <a:masterClrMapping/>
   </p:clrMapOvr>
+  <p:timing>
+    <p:tnLst>
+      <p:par>
+        <p:cTn id="1" dur="indefinite" restart="never" nodeType="tmRoot"/>
+      </p:par>
+    </p:tnLst>
+  </p:timing>
 </p:sld>
 </file>
 
 <file path=ppt/slides/slide7.xml><?xml version="1.0" encoding="utf-8"?>
-<p:sld xmlns:a="http://schemas.openxmlformats.org/drawingml/2006/main" xmlns:p="http://schemas.openxmlformats.org/presentationml/2006/main" xmlns:r="http://schemas.openxmlformats.org/officeDocument/2006/relationships">
+<p:sld xmlns:a="http://schemas.openxmlformats.org/drawingml/2006/main" xmlns:r="http://schemas.openxmlformats.org/officeDocument/2006/relationships" xmlns:p="http://schemas.openxmlformats.org/presentationml/2006/main">
   <p:cSld>
     <p:bg>
       <p:bgPr>
@@ -8048,7 +8298,14 @@
         <p:cNvGrpSpPr/>
         <p:nvPr/>
       </p:nvGrpSpPr>
-      <p:grpSpPr/>
+      <p:grpSpPr>
+        <a:xfrm>
+          <a:off x="0" y="0"/>
+          <a:ext cx="0" cy="0"/>
+          <a:chOff x="0" y="0"/>
+          <a:chExt cx="0" cy="0"/>
+        </a:xfrm>
+      </p:grpSpPr>
       <p:sp>
         <p:nvSpPr>
           <p:cNvPr id="2" name="Rectangle 1"/>
@@ -8089,6 +8346,7 @@
           <a:lstStyle/>
           <a:p>
             <a:pPr algn="ctr"/>
+            <a:endParaRPr/>
           </a:p>
         </p:txBody>
       </p:sp>
@@ -8204,6 +8462,7 @@
           <a:lstStyle/>
           <a:p>
             <a:pPr algn="ctr"/>
+            <a:endParaRPr/>
           </a:p>
         </p:txBody>
       </p:sp>
@@ -8247,6 +8506,7 @@
           <a:lstStyle/>
           <a:p>
             <a:pPr algn="ctr"/>
+            <a:endParaRPr/>
           </a:p>
         </p:txBody>
       </p:sp>
@@ -8397,6 +8657,7 @@
           <a:lstStyle/>
           <a:p>
             <a:pPr algn="ctr"/>
+            <a:endParaRPr/>
           </a:p>
         </p:txBody>
       </p:sp>
@@ -8440,6 +8701,7 @@
           <a:lstStyle/>
           <a:p>
             <a:pPr algn="ctr"/>
+            <a:endParaRPr/>
           </a:p>
         </p:txBody>
       </p:sp>
@@ -8590,6 +8852,7 @@
           <a:lstStyle/>
           <a:p>
             <a:pPr algn="ctr"/>
+            <a:endParaRPr/>
           </a:p>
         </p:txBody>
       </p:sp>
@@ -8633,6 +8896,7 @@
           <a:lstStyle/>
           <a:p>
             <a:pPr algn="ctr"/>
+            <a:endParaRPr/>
           </a:p>
         </p:txBody>
       </p:sp>
@@ -8783,6 +9047,7 @@
           <a:lstStyle/>
           <a:p>
             <a:pPr algn="ctr"/>
+            <a:endParaRPr/>
           </a:p>
         </p:txBody>
       </p:sp>
@@ -8826,6 +9091,7 @@
           <a:lstStyle/>
           <a:p>
             <a:pPr algn="ctr"/>
+            <a:endParaRPr/>
           </a:p>
         </p:txBody>
       </p:sp>
@@ -8976,6 +9242,7 @@
           <a:lstStyle/>
           <a:p>
             <a:pPr algn="ctr"/>
+            <a:endParaRPr/>
           </a:p>
         </p:txBody>
       </p:sp>
@@ -9019,6 +9286,7 @@
           <a:lstStyle/>
           <a:p>
             <a:pPr algn="ctr"/>
+            <a:endParaRPr/>
           </a:p>
         </p:txBody>
       </p:sp>
@@ -9169,6 +9437,7 @@
           <a:lstStyle/>
           <a:p>
             <a:pPr algn="ctr"/>
+            <a:endParaRPr/>
           </a:p>
         </p:txBody>
       </p:sp>
@@ -9212,6 +9481,7 @@
           <a:lstStyle/>
           <a:p>
             <a:pPr algn="ctr"/>
+            <a:endParaRPr/>
           </a:p>
         </p:txBody>
       </p:sp>
@@ -9395,11 +9665,18 @@
   <p:clrMapOvr>
     <a:masterClrMapping/>
   </p:clrMapOvr>
+  <p:timing>
+    <p:tnLst>
+      <p:par>
+        <p:cTn id="1" dur="indefinite" restart="never" nodeType="tmRoot"/>
+      </p:par>
+    </p:tnLst>
+  </p:timing>
 </p:sld>
 </file>
 
 <file path=ppt/slides/slide8.xml><?xml version="1.0" encoding="utf-8"?>
-<p:sld xmlns:a="http://schemas.openxmlformats.org/drawingml/2006/main" xmlns:p="http://schemas.openxmlformats.org/presentationml/2006/main" xmlns:r="http://schemas.openxmlformats.org/officeDocument/2006/relationships">
+<p:sld xmlns:a="http://schemas.openxmlformats.org/drawingml/2006/main" xmlns:r="http://schemas.openxmlformats.org/officeDocument/2006/relationships" xmlns:p="http://schemas.openxmlformats.org/presentationml/2006/main">
   <p:cSld>
     <p:bg>
       <p:bgPr>
@@ -9415,7 +9692,14 @@
         <p:cNvGrpSpPr/>
         <p:nvPr/>
       </p:nvGrpSpPr>
-      <p:grpSpPr/>
+      <p:grpSpPr>
+        <a:xfrm>
+          <a:off x="0" y="0"/>
+          <a:ext cx="0" cy="0"/>
+          <a:chOff x="0" y="0"/>
+          <a:chExt cx="0" cy="0"/>
+        </a:xfrm>
+      </p:grpSpPr>
       <p:sp>
         <p:nvSpPr>
           <p:cNvPr id="2" name="Rectangle 1"/>
@@ -9456,6 +9740,7 @@
           <a:lstStyle/>
           <a:p>
             <a:pPr algn="ctr"/>
+            <a:endParaRPr/>
           </a:p>
         </p:txBody>
       </p:sp>
@@ -9569,6 +9854,7 @@
           <a:lstStyle/>
           <a:p>
             <a:pPr algn="ctr"/>
+            <a:endParaRPr/>
           </a:p>
         </p:txBody>
       </p:sp>
@@ -9684,6 +9970,7 @@
           <a:lstStyle/>
           <a:p>
             <a:pPr algn="ctr"/>
+            <a:endParaRPr/>
           </a:p>
         </p:txBody>
       </p:sp>
@@ -9727,6 +10014,7 @@
           <a:lstStyle/>
           <a:p>
             <a:pPr algn="ctr"/>
+            <a:endParaRPr/>
           </a:p>
         </p:txBody>
       </p:sp>
@@ -9842,6 +10130,7 @@
           <a:lstStyle/>
           <a:p>
             <a:pPr algn="ctr"/>
+            <a:endParaRPr/>
           </a:p>
         </p:txBody>
       </p:sp>
@@ -9885,6 +10174,7 @@
           <a:lstStyle/>
           <a:p>
             <a:pPr algn="ctr"/>
+            <a:endParaRPr/>
           </a:p>
         </p:txBody>
       </p:sp>
@@ -10000,6 +10290,7 @@
           <a:lstStyle/>
           <a:p>
             <a:pPr algn="ctr"/>
+            <a:endParaRPr/>
           </a:p>
         </p:txBody>
       </p:sp>
@@ -10043,6 +10334,7 @@
           <a:lstStyle/>
           <a:p>
             <a:pPr algn="ctr"/>
+            <a:endParaRPr/>
           </a:p>
         </p:txBody>
       </p:sp>
@@ -10158,6 +10450,7 @@
           <a:lstStyle/>
           <a:p>
             <a:pPr algn="ctr"/>
+            <a:endParaRPr/>
           </a:p>
         </p:txBody>
       </p:sp>
@@ -10201,6 +10494,7 @@
           <a:lstStyle/>
           <a:p>
             <a:pPr algn="ctr"/>
+            <a:endParaRPr/>
           </a:p>
         </p:txBody>
       </p:sp>
@@ -10283,7 +10577,7 @@
         <p:spPr>
           <a:xfrm>
             <a:off x="3657600" y="5166360"/>
-            <a:ext cx="7223760" cy="594360"/>
+            <a:ext cx="7223760" cy="523220"/>
           </a:xfrm>
           <a:prstGeom prst="rect">
             <a:avLst/>
@@ -10298,14 +10592,119 @@
           <a:p>
             <a:pPr algn="l"/>
             <a:r>
-              <a:rPr sz="1400" b="0">
+              <a:rPr sz="1400" b="0" dirty="0" err="1">
                 <a:solidFill>
                   <a:srgbClr val="67748E"/>
                 </a:solidFill>
                 <a:latin typeface="Aptos"/>
               </a:rPr>
-              <a:t>Доказательства тестирования сохраняются в папке screenshots, а описание — в tests/test_cases.md.</a:t>
-            </a:r>
+              <a:t>Доказательства</a:t>
+            </a:r>
+            <a:r>
+              <a:rPr sz="1400" b="0" dirty="0">
+                <a:solidFill>
+                  <a:srgbClr val="67748E"/>
+                </a:solidFill>
+                <a:latin typeface="Aptos"/>
+              </a:rPr>
+              <a:t> </a:t>
+            </a:r>
+            <a:r>
+              <a:rPr sz="1400" b="0" dirty="0" err="1">
+                <a:solidFill>
+                  <a:srgbClr val="67748E"/>
+                </a:solidFill>
+                <a:latin typeface="Aptos"/>
+              </a:rPr>
+              <a:t>тестирования</a:t>
+            </a:r>
+            <a:r>
+              <a:rPr sz="1400" b="0" dirty="0">
+                <a:solidFill>
+                  <a:srgbClr val="67748E"/>
+                </a:solidFill>
+                <a:latin typeface="Aptos"/>
+              </a:rPr>
+              <a:t> </a:t>
+            </a:r>
+            <a:r>
+              <a:rPr sz="1400" b="0" dirty="0" err="1">
+                <a:solidFill>
+                  <a:srgbClr val="67748E"/>
+                </a:solidFill>
+                <a:latin typeface="Aptos"/>
+              </a:rPr>
+              <a:t>сохраняются</a:t>
+            </a:r>
+            <a:r>
+              <a:rPr sz="1400" b="0" dirty="0">
+                <a:solidFill>
+                  <a:srgbClr val="67748E"/>
+                </a:solidFill>
+                <a:latin typeface="Aptos"/>
+              </a:rPr>
+              <a:t> в </a:t>
+            </a:r>
+            <a:r>
+              <a:rPr sz="1400" b="0" dirty="0" err="1">
+                <a:solidFill>
+                  <a:srgbClr val="67748E"/>
+                </a:solidFill>
+                <a:latin typeface="Aptos"/>
+              </a:rPr>
+              <a:t>папке</a:t>
+            </a:r>
+            <a:r>
+              <a:rPr sz="1400" b="0" dirty="0">
+                <a:solidFill>
+                  <a:srgbClr val="67748E"/>
+                </a:solidFill>
+                <a:latin typeface="Aptos"/>
+              </a:rPr>
+              <a:t> screenshots, а </a:t>
+            </a:r>
+            <a:r>
+              <a:rPr sz="1400" b="0" dirty="0" err="1">
+                <a:solidFill>
+                  <a:srgbClr val="67748E"/>
+                </a:solidFill>
+                <a:latin typeface="Aptos"/>
+              </a:rPr>
+              <a:t>описание</a:t>
+            </a:r>
+            <a:r>
+              <a:rPr sz="1400" b="0" dirty="0">
+                <a:solidFill>
+                  <a:srgbClr val="67748E"/>
+                </a:solidFill>
+                <a:latin typeface="Aptos"/>
+              </a:rPr>
+              <a:t> — в </a:t>
+            </a:r>
+            <a:r>
+              <a:rPr sz="1400" b="0" dirty="0" smtClean="0">
+                <a:solidFill>
+                  <a:srgbClr val="67748E"/>
+                </a:solidFill>
+                <a:latin typeface="Aptos"/>
+              </a:rPr>
+              <a:t>tests/</a:t>
+            </a:r>
+            <a:r>
+              <a:rPr sz="1400" b="0" dirty="0" err="1" smtClean="0">
+                <a:solidFill>
+                  <a:srgbClr val="67748E"/>
+                </a:solidFill>
+                <a:latin typeface="Aptos"/>
+              </a:rPr>
+              <a:t>test_cases</a:t>
+            </a:r>
+            <a:endParaRPr sz="1400" b="0" dirty="0">
+              <a:solidFill>
+                <a:srgbClr val="67748E"/>
+              </a:solidFill>
+              <a:latin typeface="Aptos"/>
+            </a:endParaRPr>
           </a:p>
         </p:txBody>
       </p:sp>
@@ -10353,7 +10752,7 @@
 </file>
 
 <file path=ppt/slides/slide9.xml><?xml version="1.0" encoding="utf-8"?>
-<p:sld xmlns:a="http://schemas.openxmlformats.org/drawingml/2006/main" xmlns:p="http://schemas.openxmlformats.org/presentationml/2006/main" xmlns:r="http://schemas.openxmlformats.org/officeDocument/2006/relationships">
+<p:sld xmlns:a="http://schemas.openxmlformats.org/drawingml/2006/main" xmlns:r="http://schemas.openxmlformats.org/officeDocument/2006/relationships" xmlns:p="http://schemas.openxmlformats.org/presentationml/2006/main">
   <p:cSld>
     <p:bg>
       <p:bgPr>
@@ -10369,7 +10768,14 @@
         <p:cNvGrpSpPr/>
         <p:nvPr/>
       </p:nvGrpSpPr>
-      <p:grpSpPr/>
+      <p:grpSpPr>
+        <a:xfrm>
+          <a:off x="0" y="0"/>
+          <a:ext cx="0" cy="0"/>
+          <a:chOff x="0" y="0"/>
+          <a:chExt cx="0" cy="0"/>
+        </a:xfrm>
+      </p:grpSpPr>
       <p:sp>
         <p:nvSpPr>
           <p:cNvPr id="2" name="Rectangle 1"/>
@@ -10410,6 +10816,7 @@
           <a:lstStyle/>
           <a:p>
             <a:pPr algn="ctr"/>
+            <a:endParaRPr/>
           </a:p>
         </p:txBody>
       </p:sp>
@@ -10525,6 +10932,7 @@
           <a:lstStyle/>
           <a:p>
             <a:pPr algn="ctr"/>
+            <a:endParaRPr/>
           </a:p>
         </p:txBody>
       </p:sp>
@@ -10568,6 +10976,7 @@
           <a:lstStyle/>
           <a:p>
             <a:pPr algn="ctr"/>
+            <a:endParaRPr/>
           </a:p>
         </p:txBody>
       </p:sp>
@@ -10683,6 +11092,7 @@
           <a:lstStyle/>
           <a:p>
             <a:pPr algn="ctr"/>
+            <a:endParaRPr/>
           </a:p>
         </p:txBody>
       </p:sp>
@@ -10726,6 +11136,7 @@
           <a:lstStyle/>
           <a:p>
             <a:pPr algn="ctr"/>
+            <a:endParaRPr/>
           </a:p>
         </p:txBody>
       </p:sp>
